--- a/presentation/UNanofabTools/flaskserver/slides/09-Chemical-Inventory.pptx
+++ b/presentation/UNanofabTools/flaskserver/slides/09-Chemical-Inventory.pptx
@@ -693,7 +693,7 @@
           <a:p>
             <a:r>
               <a:rPr lang="en-US" dirty="0"/>
-              <a:t>Two candid maintenance notes, kept off the main story but recorded for whoever maintains this. First, the type-ahead and auto-fill helpers are unfinished stubs that return nothing, so those niceties don't work yet. Second — more important — the inventory pages currently don't require login, including the pages that change or remove data. That's convenient for a read-only kiosk but a real gap for the editing actions; the recommendation is to require login on at least the changing pages. Both items are in the separate issues list.</a:t>
+              <a:t>Two candid maintenance notes, kept off the main story but recorded for whoever maintains this. First, the type-ahead and auto-fill helpers are unfinished stubs that return nothing, so those niceties don't work yet. Second — more important — the chem pages used to require no login, including the pages that change or remove data — but that was resolved on 2026-06-25: they are now gated by a WordPress single-sign-on, so every /chem page requires a session granted via a signed staff-tools link (/chem/enter), covering reads and edits alike. The type-ahead/auto-fill stubs remain on the separate issues list.</a:t>
             </a:r>
             <a:endParaRPr lang="en-US" dirty="0"/>
           </a:p>
@@ -3086,7 +3086,7 @@
                 <a:ea typeface="Georgia" pitchFamily="34" charset="-122"/>
                 <a:cs typeface="Georgia" pitchFamily="34" charset="-120"/>
               </a:rPr>
-              <a:t>Access is open</a:t>
+              <a:t>Access: WordPress SSO gate</a:t>
             </a:r>
             <a:endParaRPr lang="en-US" sz="1600" dirty="0"/>
           </a:p>
@@ -3129,7 +3129,7 @@
                 <a:ea typeface="Calibri" pitchFamily="34" charset="-122"/>
                 <a:cs typeface="Calibri" pitchFamily="34" charset="-120"/>
               </a:rPr>
-              <a:t>The inventory pages don't currently require login.</a:t>
+              <a:t>All chem pages require a WordPress staff-tools sign-in (since 2026-06-25).</a:t>
             </a:r>
             <a:endParaRPr lang="en-US" sz="1350" dirty="0"/>
           </a:p>
@@ -3150,7 +3150,7 @@
                 <a:ea typeface="Calibri" pitchFamily="34" charset="-122"/>
                 <a:cs typeface="Calibri" pitchFamily="34" charset="-120"/>
               </a:rPr>
-              <a:t>Fine for reading at a kiosk; risky for the edit/remove pages.</a:t>
+              <a:t>Read and edit/remove are both behind the gate.</a:t>
             </a:r>
             <a:endParaRPr lang="en-US" sz="1350" dirty="0"/>
           </a:p>
@@ -3171,7 +3171,7 @@
                 <a:ea typeface="Calibri" pitchFamily="34" charset="-122"/>
                 <a:cs typeface="Calibri" pitchFamily="34" charset="-120"/>
               </a:rPr>
-              <a:t>Recommended to gate the changing actions behind login.</a:t>
+              <a:t>Entry is via a signed /chem/enter link; no public access.</a:t>
             </a:r>
             <a:endParaRPr lang="en-US" sz="1350" dirty="0"/>
           </a:p>

--- a/presentation/UNanofabTools/flaskserver/slides/09-Chemical-Inventory.pptx
+++ b/presentation/UNanofabTools/flaskserver/slides/09-Chemical-Inventory.pptx
@@ -1485,7 +1485,7 @@
           <a:p>
             <a:r>
               <a:rPr lang="en-US" dirty="0"/>
-              <a:t>The everyday actions. You can search the whole inventory and export it. You can add new bottles, which automatically get unique barcodes. You can move bottles between locations individually or in bulk. You can remove bottles — but as a 'soft delete' that keeps the record for history. You can edit details. And you can run scanning audits and print labels. That's a full lifecycle for a chemical container.</a:t>
+              <a:t>The everyday actions. You can search the whole inventory and export it. You can add new bottles, which automatically get unique barcodes. You can move bottles between locations individually or in bulk. You can remove bottles — but as a 'soft delete' that keeps the record for history. You can edit details — and editing is 'keep-or-update', so leaving a field blank keeps its current value rather than wiping it; that even protects the container's room, so fixing (say) an expiry date can't accidentally erase where the bottle lives. And you can run scanning audits and print labels. Small robustness touch: list views read their row-limit defensively, so a bad '?limit' value in the URL falls back to the default instead of erroring. That's a full lifecycle for a chemical container.</a:t>
             </a:r>
             <a:endParaRPr lang="en-US" dirty="0"/>
           </a:p>
@@ -7286,7 +7286,7 @@
                 <a:ea typeface="Calibri" pitchFamily="34" charset="-122"/>
                 <a:cs typeface="Calibri" pitchFamily="34" charset="-120"/>
               </a:rPr>
-              <a:t>Edit a container's details.</a:t>
+              <a:t>Edit a container's details — blank fields keep the old value, so an edit can't erase a bottle's location.</a:t>
             </a:r>
             <a:endParaRPr lang="en-US" sz="1500" dirty="0"/>
           </a:p>
